--- a/docs/Z+ User & Admin Guide.pptx
+++ b/docs/Z+ User & Admin Guide.pptx
@@ -9285,7 +9285,7 @@
                           <a:ea typeface="Calibri" pitchFamily="34" charset="-122"/>
                           <a:cs typeface="Calibri" pitchFamily="34" charset="-120"/>
                         </a:rPr>
-                        <a:t>dotnet publish &lt;project&gt; -c Release</a:t>
+                        <a:t>Windows: dotnet publish · Linux: make (net10.0)</a:t>
                       </a:r>
                       <a:endParaRPr lang="en-US" sz="1050" dirty="0">
                         <a:latin typeface="Calibri" charset="0"/>

--- a/docs/Z+ User & Admin Guide.pptx
+++ b/docs/Z+ User & Admin Guide.pptx
@@ -22,9 +22,10 @@
     <p:sldId id="270" r:id="rId16"/>
     <p:sldId id="271" r:id="rId17"/>
     <p:sldId id="272" r:id="rId18"/>
+    <p:sldId id="273" r:id="rId19"/>
   </p:sldIdLst>
   <p:notesMasterIdLst>
-    <p:notesMasterId r:id="rId19"/>
+    <p:notesMasterId r:id="rId20"/>
   </p:notesMasterIdLst>
   <p:sldSz cx="9144000" cy="5143500"/>
   <p:notesSz cx="5143500" cy="9144000"/>
@@ -1246,6 +1247,94 @@
             <a:fld id="{F7021451-1387-4CA6-816F-3879F97B5CBC}" type="slidenum">
               <a:rPr lang="en-US"/>
               <a:t>17</a:t>
+            </a:fld>
+            <a:endParaRPr lang="en-US"/>
+          </a:p>
+        </p:txBody>
+      </p:sp>
+    </p:spTree>
+    <p:extLst>
+      <p:ext uri="{BB962C8B-B14F-4D97-AF65-F5344CB8AC3E}">
+        <p14:creationId xmlns:p14="http://schemas.microsoft.com/office/powerpoint/2010/main" val="1024086991"/>
+      </p:ext>
+    </p:extLst>
+  </p:cSld>
+  <p:clrMapOvr>
+    <a:masterClrMapping/>
+  </p:clrMapOvr>
+</p:notes>
+</file>
+
+<file path=ppt/notesSlides/notesSlide18.xml><?xml version="1.0" encoding="utf-8"?>
+<p:notes xmlns:a="http://schemas.openxmlformats.org/drawingml/2006/main" xmlns:r="http://schemas.openxmlformats.org/officeDocument/2006/relationships" xmlns:p="http://schemas.openxmlformats.org/presentationml/2006/main">
+  <p:cSld>
+    <p:spTree>
+      <p:nvGrpSpPr>
+        <p:cNvPr id="1" name=""/>
+        <p:cNvGrpSpPr/>
+        <p:nvPr/>
+      </p:nvGrpSpPr>
+      <p:grpSpPr>
+        <a:xfrm>
+          <a:off x="0" y="0"/>
+          <a:ext cx="0" cy="0"/>
+          <a:chOff x="0" y="0"/>
+          <a:chExt cx="0" cy="0"/>
+        </a:xfrm>
+      </p:grpSpPr>
+      <p:sp>
+        <p:nvSpPr>
+          <p:cNvPr id="2" name="Slide Image Placeholder 1"/>
+          <p:cNvSpPr>
+            <a:spLocks noGrp="1" noRot="1" noChangeAspect="1"/>
+          </p:cNvSpPr>
+          <p:nvPr>
+            <p:ph type="sldImg"/>
+          </p:nvPr>
+        </p:nvSpPr>
+        <p:spPr/>
+      </p:sp>
+      <p:sp>
+        <p:nvSpPr>
+          <p:cNvPr id="3" name="Notes Placeholder 2"/>
+          <p:cNvSpPr>
+            <a:spLocks noGrp="1"/>
+          </p:cNvSpPr>
+          <p:nvPr>
+            <p:ph type="body" idx="1"/>
+          </p:nvPr>
+        </p:nvSpPr>
+        <p:spPr/>
+        <p:txBody>
+          <a:bodyPr/>
+          <a:lstStyle/>
+          <a:p>
+            <a:r>
+              <a:rPr lang="en-US" dirty="0"/>
+              <a:t/>
+            </a:r>
+            <a:endParaRPr lang="en-US" dirty="0"/>
+          </a:p>
+        </p:txBody>
+      </p:sp>
+      <p:sp>
+        <p:nvSpPr>
+          <p:cNvPr id="4" name="Slide Number Placeholder 3"/>
+          <p:cNvSpPr>
+            <a:spLocks noGrp="1"/>
+          </p:cNvSpPr>
+          <p:nvPr>
+            <p:ph type="sldNum" sz="quarter" idx="10"/>
+          </p:nvPr>
+        </p:nvSpPr>
+        <p:spPr/>
+        <p:txBody>
+          <a:bodyPr/>
+          <a:lstStyle/>
+          <a:p>
+            <a:fld id="{F7021451-1387-4CA6-816F-3879F97B5CBC}" type="slidenum">
+              <a:rPr lang="en-US"/>
+              <a:t>18</a:t>
             </a:fld>
             <a:endParaRPr lang="en-US"/>
           </a:p>
@@ -5566,12 +5655,12 @@
         </p:nvSpPr>
         <p:spPr>
           <a:xfrm>
-            <a:off x="457200" y="1325880"/>
-            <a:ext cx="3995928" cy="1554480"/>
+            <a:off x="457200" y="1234440"/>
+            <a:ext cx="2578608" cy="1572768"/>
           </a:xfrm>
           <a:prstGeom prst="roundRect">
             <a:avLst>
-              <a:gd name="adj" fmla="val 4706"/>
+              <a:gd name="adj" fmla="val 4651"/>
             </a:avLst>
           </a:prstGeom>
           <a:solidFill>
@@ -5595,8 +5684,8 @@
         </p:nvSpPr>
         <p:spPr>
           <a:xfrm>
-            <a:off x="658368" y="1508760"/>
-            <a:ext cx="438912" cy="438912"/>
+            <a:off x="640080" y="1399032"/>
+            <a:ext cx="402336" cy="402336"/>
           </a:xfrm>
           <a:prstGeom prst="ellipse">
             <a:avLst/>
@@ -5623,8 +5712,8 @@
         </p:blipFill>
         <p:spPr>
           <a:xfrm>
-            <a:off x="772485" y="1622877"/>
-            <a:ext cx="210678" cy="210678"/>
+            <a:off x="744687" y="1503639"/>
+            <a:ext cx="193121" cy="193121"/>
           </a:xfrm>
           <a:prstGeom prst="rect">
             <a:avLst/>
@@ -5639,24 +5728,24 @@
         </p:nvSpPr>
         <p:spPr>
           <a:xfrm>
-            <a:off x="1234440" y="1545336"/>
-            <a:ext cx="3035808" cy="292608"/>
-          </a:xfrm>
-          <a:prstGeom prst="rect">
-            <a:avLst/>
-          </a:prstGeom>
-          <a:noFill/>
-          <a:ln/>
-        </p:spPr>
-        <p:txBody>
-          <a:bodyPr wrap="square" lIns="0" tIns="0" rIns="0" bIns="0" rtlCol="0" anchor="ctr"/>
+            <a:off x="1152144" y="1380744"/>
+            <a:ext cx="1709928" cy="457200"/>
+          </a:xfrm>
+          <a:prstGeom prst="rect">
+            <a:avLst/>
+          </a:prstGeom>
+          <a:noFill/>
+          <a:ln/>
+        </p:spPr>
+        <p:txBody>
+          <a:bodyPr wrap="square" lIns="0" tIns="0" rIns="0" bIns="0" rtlCol="0" anchor="t"/>
           <a:lstStyle/>
           <a:p>
             <a:pPr indent="0" marL="0">
               <a:buNone/>
             </a:pPr>
             <a:r>
-              <a:rPr lang="en-US" sz="1300" b="1" dirty="0">
+              <a:rPr lang="en-US" sz="1200" b="1" dirty="0">
                 <a:solidFill>
                   <a:srgbClr val="F2F2F2"/>
                 </a:solidFill>
@@ -5666,7 +5755,7 @@
               </a:rPr>
               <a:t>Allow self-registration</a:t>
             </a:r>
-            <a:endParaRPr lang="en-US" sz="1300" dirty="0"/>
+            <a:endParaRPr lang="en-US" sz="1200" dirty="0"/>
           </a:p>
         </p:txBody>
       </p:sp>
@@ -5678,8 +5767,8 @@
         </p:nvSpPr>
         <p:spPr>
           <a:xfrm>
-            <a:off x="1234440" y="1856232"/>
-            <a:ext cx="3035808" cy="914400"/>
+            <a:off x="640080" y="1892808"/>
+            <a:ext cx="2212848" cy="841248"/>
           </a:xfrm>
           <a:prstGeom prst="rect">
             <a:avLst/>
@@ -5695,7 +5784,7 @@
               <a:buNone/>
             </a:pPr>
             <a:r>
-              <a:rPr lang="en-US" sz="1100" dirty="0">
+              <a:rPr lang="en-US" sz="1000" dirty="0">
                 <a:solidFill>
                   <a:srgbClr val="C9CED6"/>
                 </a:solidFill>
@@ -5705,7 +5794,7 @@
               </a:rPr>
               <a:t>On: anyone who can reach the server may create an account.  Off: only admins create accounts.</a:t>
             </a:r>
-            <a:endParaRPr lang="en-US" sz="1100" dirty="0"/>
+            <a:endParaRPr lang="en-US" sz="1000" dirty="0"/>
           </a:p>
         </p:txBody>
       </p:sp>
@@ -5717,12 +5806,12 @@
         </p:nvSpPr>
         <p:spPr>
           <a:xfrm>
-            <a:off x="4690872" y="1325880"/>
-            <a:ext cx="3995928" cy="1554480"/>
+            <a:off x="3273552" y="1234440"/>
+            <a:ext cx="2578608" cy="1572768"/>
           </a:xfrm>
           <a:prstGeom prst="roundRect">
             <a:avLst>
-              <a:gd name="adj" fmla="val 4706"/>
+              <a:gd name="adj" fmla="val 4651"/>
             </a:avLst>
           </a:prstGeom>
           <a:solidFill>
@@ -5746,8 +5835,8 @@
         </p:nvSpPr>
         <p:spPr>
           <a:xfrm>
-            <a:off x="4892040" y="1508760"/>
-            <a:ext cx="438912" cy="438912"/>
+            <a:off x="3456432" y="1399032"/>
+            <a:ext cx="402336" cy="402336"/>
           </a:xfrm>
           <a:prstGeom prst="ellipse">
             <a:avLst/>
@@ -5774,8 +5863,8 @@
         </p:blipFill>
         <p:spPr>
           <a:xfrm>
-            <a:off x="5006157" y="1622877"/>
-            <a:ext cx="210678" cy="210678"/>
+            <a:off x="3561039" y="1503639"/>
+            <a:ext cx="193121" cy="193121"/>
           </a:xfrm>
           <a:prstGeom prst="rect">
             <a:avLst/>
@@ -5790,24 +5879,24 @@
         </p:nvSpPr>
         <p:spPr>
           <a:xfrm>
-            <a:off x="5468112" y="1545336"/>
-            <a:ext cx="3035808" cy="292608"/>
-          </a:xfrm>
-          <a:prstGeom prst="rect">
-            <a:avLst/>
-          </a:prstGeom>
-          <a:noFill/>
-          <a:ln/>
-        </p:spPr>
-        <p:txBody>
-          <a:bodyPr wrap="square" lIns="0" tIns="0" rIns="0" bIns="0" rtlCol="0" anchor="ctr"/>
+            <a:off x="3968496" y="1380744"/>
+            <a:ext cx="1709928" cy="457200"/>
+          </a:xfrm>
+          <a:prstGeom prst="rect">
+            <a:avLst/>
+          </a:prstGeom>
+          <a:noFill/>
+          <a:ln/>
+        </p:spPr>
+        <p:txBody>
+          <a:bodyPr wrap="square" lIns="0" tIns="0" rIns="0" bIns="0" rtlCol="0" anchor="t"/>
           <a:lstStyle/>
           <a:p>
             <a:pPr indent="0" marL="0">
               <a:buNone/>
             </a:pPr>
             <a:r>
-              <a:rPr lang="en-US" sz="1300" b="1" dirty="0">
+              <a:rPr lang="en-US" sz="1200" b="1" dirty="0">
                 <a:solidFill>
                   <a:srgbClr val="F2F2F2"/>
                 </a:solidFill>
@@ -5817,7 +5906,7 @@
               </a:rPr>
               <a:t>Require meeting passwords</a:t>
             </a:r>
-            <a:endParaRPr lang="en-US" sz="1300" dirty="0"/>
+            <a:endParaRPr lang="en-US" sz="1200" dirty="0"/>
           </a:p>
         </p:txBody>
       </p:sp>
@@ -5829,8 +5918,8 @@
         </p:nvSpPr>
         <p:spPr>
           <a:xfrm>
-            <a:off x="5468112" y="1856232"/>
-            <a:ext cx="3035808" cy="914400"/>
+            <a:off x="3456432" y="1892808"/>
+            <a:ext cx="2212848" cy="841248"/>
           </a:xfrm>
           <a:prstGeom prst="rect">
             <a:avLst/>
@@ -5846,7 +5935,7 @@
               <a:buNone/>
             </a:pPr>
             <a:r>
-              <a:rPr lang="en-US" sz="1100" dirty="0">
+              <a:rPr lang="en-US" sz="1000" dirty="0">
                 <a:solidFill>
                   <a:srgbClr val="C9CED6"/>
                 </a:solidFill>
@@ -5856,7 +5945,7 @@
               </a:rPr>
               <a:t>Forces a password on every newly created meeting, org-wide.</a:t>
             </a:r>
-            <a:endParaRPr lang="en-US" sz="1100" dirty="0"/>
+            <a:endParaRPr lang="en-US" sz="1000" dirty="0"/>
           </a:p>
         </p:txBody>
       </p:sp>
@@ -5868,12 +5957,12 @@
         </p:nvSpPr>
         <p:spPr>
           <a:xfrm>
-            <a:off x="457200" y="3099816"/>
-            <a:ext cx="3995928" cy="1554480"/>
+            <a:off x="6089904" y="1234440"/>
+            <a:ext cx="2578608" cy="1572768"/>
           </a:xfrm>
           <a:prstGeom prst="roundRect">
             <a:avLst>
-              <a:gd name="adj" fmla="val 4706"/>
+              <a:gd name="adj" fmla="val 4651"/>
             </a:avLst>
           </a:prstGeom>
           <a:solidFill>
@@ -5897,8 +5986,8 @@
         </p:nvSpPr>
         <p:spPr>
           <a:xfrm>
-            <a:off x="658368" y="3282696"/>
-            <a:ext cx="438912" cy="438912"/>
+            <a:off x="6272784" y="1399032"/>
+            <a:ext cx="402336" cy="402336"/>
           </a:xfrm>
           <a:prstGeom prst="ellipse">
             <a:avLst/>
@@ -5925,8 +6014,8 @@
         </p:blipFill>
         <p:spPr>
           <a:xfrm>
-            <a:off x="772485" y="3396813"/>
-            <a:ext cx="210678" cy="210678"/>
+            <a:off x="6377391" y="1503639"/>
+            <a:ext cx="193121" cy="193121"/>
           </a:xfrm>
           <a:prstGeom prst="rect">
             <a:avLst/>
@@ -5941,24 +6030,24 @@
         </p:nvSpPr>
         <p:spPr>
           <a:xfrm>
-            <a:off x="1234440" y="3319272"/>
-            <a:ext cx="3035808" cy="292608"/>
-          </a:xfrm>
-          <a:prstGeom prst="rect">
-            <a:avLst/>
-          </a:prstGeom>
-          <a:noFill/>
-          <a:ln/>
-        </p:spPr>
-        <p:txBody>
-          <a:bodyPr wrap="square" lIns="0" tIns="0" rIns="0" bIns="0" rtlCol="0" anchor="ctr"/>
+            <a:off x="6784848" y="1380744"/>
+            <a:ext cx="1709928" cy="457200"/>
+          </a:xfrm>
+          <a:prstGeom prst="rect">
+            <a:avLst/>
+          </a:prstGeom>
+          <a:noFill/>
+          <a:ln/>
+        </p:spPr>
+        <p:txBody>
+          <a:bodyPr wrap="square" lIns="0" tIns="0" rIns="0" bIns="0" rtlCol="0" anchor="t"/>
           <a:lstStyle/>
           <a:p>
             <a:pPr indent="0" marL="0">
               <a:buNone/>
             </a:pPr>
             <a:r>
-              <a:rPr lang="en-US" sz="1300" b="1" dirty="0">
+              <a:rPr lang="en-US" sz="1200" b="1" dirty="0">
                 <a:solidFill>
                   <a:srgbClr val="F2F2F2"/>
                 </a:solidFill>
@@ -5966,9 +6055,9 @@
                 <a:ea typeface="Calibri" pitchFamily="34" charset="-122"/>
                 <a:cs typeface="Calibri" pitchFamily="34" charset="-120"/>
               </a:rPr>
-              <a:t>Max participants per meeting</a:t>
-            </a:r>
-            <a:endParaRPr lang="en-US" sz="1300" dirty="0"/>
+              <a:t>Max participants</a:t>
+            </a:r>
+            <a:endParaRPr lang="en-US" sz="1200" dirty="0"/>
           </a:p>
         </p:txBody>
       </p:sp>
@@ -5980,8 +6069,8 @@
         </p:nvSpPr>
         <p:spPr>
           <a:xfrm>
-            <a:off x="1234440" y="3630168"/>
-            <a:ext cx="3035808" cy="914400"/>
+            <a:off x="6272784" y="1892808"/>
+            <a:ext cx="2212848" cy="841248"/>
           </a:xfrm>
           <a:prstGeom prst="rect">
             <a:avLst/>
@@ -5997,7 +6086,7 @@
               <a:buNone/>
             </a:pPr>
             <a:r>
-              <a:rPr lang="en-US" sz="1100" dirty="0">
+              <a:rPr lang="en-US" sz="1000" dirty="0">
                 <a:solidFill>
                   <a:srgbClr val="C9CED6"/>
                 </a:solidFill>
@@ -6005,9 +6094,9 @@
                 <a:ea typeface="Calibri" pitchFamily="34" charset="-122"/>
                 <a:cs typeface="Calibri" pitchFamily="34" charset="-120"/>
               </a:rPr>
-              <a:t>2–1000. Joins beyond the cap are rejected with a “meeting is full” message.</a:t>
-            </a:r>
-            <a:endParaRPr lang="en-US" sz="1100" dirty="0"/>
+              <a:t>2–1000 per meeting. Joins beyond the cap are rejected as “meeting is full”.</a:t>
+            </a:r>
+            <a:endParaRPr lang="en-US" sz="1000" dirty="0"/>
           </a:p>
         </p:txBody>
       </p:sp>
@@ -6019,12 +6108,12 @@
         </p:nvSpPr>
         <p:spPr>
           <a:xfrm>
-            <a:off x="4690872" y="3099816"/>
-            <a:ext cx="3995928" cy="1554480"/>
+            <a:off x="457200" y="3026664"/>
+            <a:ext cx="2578608" cy="1572768"/>
           </a:xfrm>
           <a:prstGeom prst="roundRect">
             <a:avLst>
-              <a:gd name="adj" fmla="val 4706"/>
+              <a:gd name="adj" fmla="val 4651"/>
             </a:avLst>
           </a:prstGeom>
           <a:solidFill>
@@ -6048,8 +6137,8 @@
         </p:nvSpPr>
         <p:spPr>
           <a:xfrm>
-            <a:off x="4892040" y="3282696"/>
-            <a:ext cx="438912" cy="438912"/>
+            <a:off x="640080" y="3191256"/>
+            <a:ext cx="402336" cy="402336"/>
           </a:xfrm>
           <a:prstGeom prst="ellipse">
             <a:avLst/>
@@ -6076,8 +6165,8 @@
         </p:blipFill>
         <p:spPr>
           <a:xfrm>
-            <a:off x="5006157" y="3396813"/>
-            <a:ext cx="210678" cy="210678"/>
+            <a:off x="744687" y="3295863"/>
+            <a:ext cx="193121" cy="193121"/>
           </a:xfrm>
           <a:prstGeom prst="rect">
             <a:avLst/>
@@ -6092,24 +6181,24 @@
         </p:nvSpPr>
         <p:spPr>
           <a:xfrm>
-            <a:off x="5468112" y="3319272"/>
-            <a:ext cx="3035808" cy="292608"/>
-          </a:xfrm>
-          <a:prstGeom prst="rect">
-            <a:avLst/>
-          </a:prstGeom>
-          <a:noFill/>
-          <a:ln/>
-        </p:spPr>
-        <p:txBody>
-          <a:bodyPr wrap="square" lIns="0" tIns="0" rIns="0" bIns="0" rtlCol="0" anchor="ctr"/>
+            <a:off x="1152144" y="3172968"/>
+            <a:ext cx="1709928" cy="457200"/>
+          </a:xfrm>
+          <a:prstGeom prst="rect">
+            <a:avLst/>
+          </a:prstGeom>
+          <a:noFill/>
+          <a:ln/>
+        </p:spPr>
+        <p:txBody>
+          <a:bodyPr wrap="square" lIns="0" tIns="0" rIns="0" bIns="0" rtlCol="0" anchor="t"/>
           <a:lstStyle/>
           <a:p>
             <a:pPr indent="0" marL="0">
               <a:buNone/>
             </a:pPr>
             <a:r>
-              <a:rPr lang="en-US" sz="1300" b="1" dirty="0">
+              <a:rPr lang="en-US" sz="1200" b="1" dirty="0">
                 <a:solidFill>
                   <a:srgbClr val="F2F2F2"/>
                 </a:solidFill>
@@ -6119,7 +6208,7 @@
               </a:rPr>
               <a:t>Server listen URL</a:t>
             </a:r>
-            <a:endParaRPr lang="en-US" sz="1300" dirty="0"/>
+            <a:endParaRPr lang="en-US" sz="1200" dirty="0"/>
           </a:p>
         </p:txBody>
       </p:sp>
@@ -6131,8 +6220,8 @@
         </p:nvSpPr>
         <p:spPr>
           <a:xfrm>
-            <a:off x="5468112" y="3630168"/>
-            <a:ext cx="3035808" cy="914400"/>
+            <a:off x="640080" y="3685032"/>
+            <a:ext cx="2212848" cy="841248"/>
           </a:xfrm>
           <a:prstGeom prst="rect">
             <a:avLst/>
@@ -6148,7 +6237,7 @@
               <a:buNone/>
             </a:pPr>
             <a:r>
-              <a:rPr lang="en-US" sz="1100" dirty="0">
+              <a:rPr lang="en-US" sz="1000" dirty="0">
                 <a:solidFill>
                   <a:srgbClr val="C9CED6"/>
                 </a:solidFill>
@@ -6156,9 +6245,311 @@
                 <a:ea typeface="Calibri" pitchFamily="34" charset="-122"/>
                 <a:cs typeface="Calibri" pitchFamily="34" charset="-120"/>
               </a:rPr>
-              <a:t>Bind address and port (default http://0.0.0.0:5199). Takes effect after a server restart.</a:t>
-            </a:r>
-            <a:endParaRPr lang="en-US" sz="1100" dirty="0"/>
+              <a:t>Bind address and port (default http://0.0.0.0:5199). Applied on restart.</a:t>
+            </a:r>
+            <a:endParaRPr lang="en-US" sz="1000" dirty="0"/>
+          </a:p>
+        </p:txBody>
+      </p:sp>
+      <p:sp>
+        <p:nvSpPr>
+          <p:cNvPr id="24" name="Shape 18"/>
+          <p:cNvSpPr/>
+          <p:nvPr/>
+        </p:nvSpPr>
+        <p:spPr>
+          <a:xfrm>
+            <a:off x="3273552" y="3026664"/>
+            <a:ext cx="2578608" cy="1572768"/>
+          </a:xfrm>
+          <a:prstGeom prst="roundRect">
+            <a:avLst>
+              <a:gd name="adj" fmla="val 4651"/>
+            </a:avLst>
+          </a:prstGeom>
+          <a:solidFill>
+            <a:srgbClr val="24262E"/>
+          </a:solidFill>
+          <a:ln/>
+          <a:effectLst>
+            <a:outerShdw sx="100000" sy="100000" kx="0" ky="0" algn="bl" rotWithShape="0" blurRad="101600" dist="38100" dir="5400000">
+              <a:srgbClr val="000000">
+                <a:alpha val="35000"/>
+              </a:srgbClr>
+            </a:outerShdw>
+          </a:effectLst>
+        </p:spPr>
+      </p:sp>
+      <p:sp>
+        <p:nvSpPr>
+          <p:cNvPr id="25" name="Shape 19"/>
+          <p:cNvSpPr/>
+          <p:nvPr/>
+        </p:nvSpPr>
+        <p:spPr>
+          <a:xfrm>
+            <a:off x="3456432" y="3191256"/>
+            <a:ext cx="402336" cy="402336"/>
+          </a:xfrm>
+          <a:prstGeom prst="ellipse">
+            <a:avLst/>
+          </a:prstGeom>
+          <a:solidFill>
+            <a:srgbClr val="2D8CFF"/>
+          </a:solidFill>
+          <a:ln/>
+        </p:spPr>
+      </p:sp>
+      <p:pic>
+        <p:nvPicPr>
+          <p:cNvPr id="26" name="Image 4" descr="preencoded.png">    </p:cNvPr>
+          <p:cNvPicPr>
+            <a:picLocks noChangeAspect="1"/>
+          </p:cNvPicPr>
+          <p:nvPr/>
+        </p:nvPicPr>
+        <p:blipFill>
+          <a:blip r:embed="rId5"/>
+          <a:stretch>
+            <a:fillRect/>
+          </a:stretch>
+        </p:blipFill>
+        <p:spPr>
+          <a:xfrm>
+            <a:off x="3561039" y="3295863"/>
+            <a:ext cx="193121" cy="193121"/>
+          </a:xfrm>
+          <a:prstGeom prst="rect">
+            <a:avLst/>
+          </a:prstGeom>
+        </p:spPr>
+      </p:pic>
+      <p:sp>
+        <p:nvSpPr>
+          <p:cNvPr id="27" name="Text 20"/>
+          <p:cNvSpPr/>
+          <p:nvPr/>
+        </p:nvSpPr>
+        <p:spPr>
+          <a:xfrm>
+            <a:off x="3968496" y="3172968"/>
+            <a:ext cx="1709928" cy="457200"/>
+          </a:xfrm>
+          <a:prstGeom prst="rect">
+            <a:avLst/>
+          </a:prstGeom>
+          <a:noFill/>
+          <a:ln/>
+        </p:spPr>
+        <p:txBody>
+          <a:bodyPr wrap="square" lIns="0" tIns="0" rIns="0" bIns="0" rtlCol="0" anchor="t"/>
+          <a:lstStyle/>
+          <a:p>
+            <a:pPr indent="0" marL="0">
+              <a:buNone/>
+            </a:pPr>
+            <a:r>
+              <a:rPr lang="en-US" sz="1200" b="1" dirty="0">
+                <a:solidFill>
+                  <a:srgbClr val="F2F2F2"/>
+                </a:solidFill>
+                <a:latin typeface="Calibri" pitchFamily="34" charset="0"/>
+                <a:ea typeface="Calibri" pitchFamily="34" charset="-122"/>
+                <a:cs typeface="Calibri" pitchFamily="34" charset="-120"/>
+              </a:rPr>
+              <a:t>Email invitations (SMTP)</a:t>
+            </a:r>
+            <a:endParaRPr lang="en-US" sz="1200" dirty="0"/>
+          </a:p>
+        </p:txBody>
+      </p:sp>
+      <p:sp>
+        <p:nvSpPr>
+          <p:cNvPr id="28" name="Text 21"/>
+          <p:cNvSpPr/>
+          <p:nvPr/>
+        </p:nvSpPr>
+        <p:spPr>
+          <a:xfrm>
+            <a:off x="3456432" y="3685032"/>
+            <a:ext cx="2212848" cy="841248"/>
+          </a:xfrm>
+          <a:prstGeom prst="rect">
+            <a:avLst/>
+          </a:prstGeom>
+          <a:noFill/>
+          <a:ln/>
+        </p:spPr>
+        <p:txBody>
+          <a:bodyPr wrap="square" lIns="0" tIns="0" rIns="0" bIns="0" rtlCol="0" anchor="t"/>
+          <a:lstStyle/>
+          <a:p>
+            <a:pPr indent="0" marL="0">
+              <a:buNone/>
+            </a:pPr>
+            <a:r>
+              <a:rPr lang="en-US" sz="1000" dirty="0">
+                <a:solidFill>
+                  <a:srgbClr val="C9CED6"/>
+                </a:solidFill>
+                <a:latin typeface="Calibri" pitchFamily="34" charset="0"/>
+                <a:ea typeface="Calibri" pitchFamily="34" charset="-122"/>
+                <a:cs typeface="Calibri" pitchFamily="34" charset="-120"/>
+              </a:rPr>
+              <a:t>Host, port, from, credentials. Empty host = email off. Password stored encrypted, write-only.</a:t>
+            </a:r>
+            <a:endParaRPr lang="en-US" sz="1000" dirty="0"/>
+          </a:p>
+        </p:txBody>
+      </p:sp>
+      <p:sp>
+        <p:nvSpPr>
+          <p:cNvPr id="29" name="Shape 22"/>
+          <p:cNvSpPr/>
+          <p:nvPr/>
+        </p:nvSpPr>
+        <p:spPr>
+          <a:xfrm>
+            <a:off x="6089904" y="3026664"/>
+            <a:ext cx="2578608" cy="1572768"/>
+          </a:xfrm>
+          <a:prstGeom prst="roundRect">
+            <a:avLst>
+              <a:gd name="adj" fmla="val 4651"/>
+            </a:avLst>
+          </a:prstGeom>
+          <a:solidFill>
+            <a:srgbClr val="24262E"/>
+          </a:solidFill>
+          <a:ln/>
+          <a:effectLst>
+            <a:outerShdw sx="100000" sy="100000" kx="0" ky="0" algn="bl" rotWithShape="0" blurRad="101600" dist="38100" dir="5400000">
+              <a:srgbClr val="000000">
+                <a:alpha val="35000"/>
+              </a:srgbClr>
+            </a:outerShdw>
+          </a:effectLst>
+        </p:spPr>
+      </p:sp>
+      <p:sp>
+        <p:nvSpPr>
+          <p:cNvPr id="30" name="Shape 23"/>
+          <p:cNvSpPr/>
+          <p:nvPr/>
+        </p:nvSpPr>
+        <p:spPr>
+          <a:xfrm>
+            <a:off x="6272784" y="3191256"/>
+            <a:ext cx="402336" cy="402336"/>
+          </a:xfrm>
+          <a:prstGeom prst="ellipse">
+            <a:avLst/>
+          </a:prstGeom>
+          <a:solidFill>
+            <a:srgbClr val="2D8CFF"/>
+          </a:solidFill>
+          <a:ln/>
+        </p:spPr>
+      </p:sp>
+      <p:pic>
+        <p:nvPicPr>
+          <p:cNvPr id="31" name="Image 5" descr="preencoded.png">    </p:cNvPr>
+          <p:cNvPicPr>
+            <a:picLocks noChangeAspect="1"/>
+          </p:cNvPicPr>
+          <p:nvPr/>
+        </p:nvPicPr>
+        <p:blipFill>
+          <a:blip r:embed="rId6"/>
+          <a:stretch>
+            <a:fillRect/>
+          </a:stretch>
+        </p:blipFill>
+        <p:spPr>
+          <a:xfrm>
+            <a:off x="6377391" y="3295863"/>
+            <a:ext cx="193121" cy="193121"/>
+          </a:xfrm>
+          <a:prstGeom prst="rect">
+            <a:avLst/>
+          </a:prstGeom>
+        </p:spPr>
+      </p:pic>
+      <p:sp>
+        <p:nvSpPr>
+          <p:cNvPr id="32" name="Text 24"/>
+          <p:cNvSpPr/>
+          <p:nvPr/>
+        </p:nvSpPr>
+        <p:spPr>
+          <a:xfrm>
+            <a:off x="6784848" y="3172968"/>
+            <a:ext cx="1709928" cy="457200"/>
+          </a:xfrm>
+          <a:prstGeom prst="rect">
+            <a:avLst/>
+          </a:prstGeom>
+          <a:noFill/>
+          <a:ln/>
+        </p:spPr>
+        <p:txBody>
+          <a:bodyPr wrap="square" lIns="0" tIns="0" rIns="0" bIns="0" rtlCol="0" anchor="t"/>
+          <a:lstStyle/>
+          <a:p>
+            <a:pPr indent="0" marL="0">
+              <a:buNone/>
+            </a:pPr>
+            <a:r>
+              <a:rPr lang="en-US" sz="1200" b="1" dirty="0">
+                <a:solidFill>
+                  <a:srgbClr val="F2F2F2"/>
+                </a:solidFill>
+                <a:latin typeface="Calibri" pitchFamily="34" charset="0"/>
+                <a:ea typeface="Calibri" pitchFamily="34" charset="-122"/>
+                <a:cs typeface="Calibri" pitchFamily="34" charset="-120"/>
+              </a:rPr>
+              <a:t>Public URL</a:t>
+            </a:r>
+            <a:endParaRPr lang="en-US" sz="1200" dirty="0"/>
+          </a:p>
+        </p:txBody>
+      </p:sp>
+      <p:sp>
+        <p:nvSpPr>
+          <p:cNvPr id="33" name="Text 25"/>
+          <p:cNvSpPr/>
+          <p:nvPr/>
+        </p:nvSpPr>
+        <p:spPr>
+          <a:xfrm>
+            <a:off x="6272784" y="3685032"/>
+            <a:ext cx="2212848" cy="841248"/>
+          </a:xfrm>
+          <a:prstGeom prst="rect">
+            <a:avLst/>
+          </a:prstGeom>
+          <a:noFill/>
+          <a:ln/>
+        </p:spPr>
+        <p:txBody>
+          <a:bodyPr wrap="square" lIns="0" tIns="0" rIns="0" bIns="0" rtlCol="0" anchor="t"/>
+          <a:lstStyle/>
+          <a:p>
+            <a:pPr indent="0" marL="0">
+              <a:buNone/>
+            </a:pPr>
+            <a:r>
+              <a:rPr lang="en-US" sz="1000" dirty="0">
+                <a:solidFill>
+                  <a:srgbClr val="C9CED6"/>
+                </a:solidFill>
+                <a:latin typeface="Calibri" pitchFamily="34" charset="0"/>
+                <a:ea typeface="Calibri" pitchFamily="34" charset="-122"/>
+                <a:cs typeface="Calibri" pitchFamily="34" charset="-120"/>
+              </a:rPr>
+              <a:t>The reachable address used in invitation links, e.g. http://192.168.1.10:5199.</a:t>
+            </a:r>
+            <a:endParaRPr lang="en-US" sz="1000" dirty="0"/>
           </a:p>
         </p:txBody>
       </p:sp>
@@ -7492,7 +7883,7 @@
                 <a:ea typeface="Arial" pitchFamily="34" charset="-122"/>
                 <a:cs typeface="Arial" pitchFamily="34" charset="-120"/>
               </a:rPr>
-              <a:t>Z+ on Linux</a:t>
+              <a:t>End-to-end encryption</a:t>
             </a:r>
             <a:endParaRPr lang="en-US" sz="3000" dirty="0"/>
           </a:p>
@@ -7531,7 +7922,7 @@
                 <a:ea typeface="Calibri" pitchFamily="34" charset="-122"/>
                 <a:cs typeface="Calibri" pitchFamily="34" charset="-120"/>
               </a:rPr>
-              <a:t>Three self-contained x64 binaries in publish/linux — no .NET install; chmod +x and run.</a:t>
+              <a:t>Meeting content is encrypted between participants — the server cannot read it.</a:t>
             </a:r>
             <a:endParaRPr lang="en-US" sz="1200" dirty="0"/>
           </a:p>
@@ -7546,7 +7937,7 @@
         <p:spPr>
           <a:xfrm>
             <a:off x="457200" y="1188720"/>
-            <a:ext cx="2578608" cy="3063240"/>
+            <a:ext cx="2578608" cy="2926080"/>
           </a:xfrm>
           <a:prstGeom prst="roundRect">
             <a:avLst>
@@ -7635,17 +8026,17 @@
               <a:buNone/>
             </a:pPr>
             <a:r>
-              <a:rPr lang="en-US" sz="1350" b="1" dirty="0">
+              <a:rPr lang="en-US" sz="1400" b="1" dirty="0">
                 <a:solidFill>
                   <a:srgbClr val="F2F2F2"/>
                 </a:solidFill>
-                <a:latin typeface="Consolas" pitchFamily="34" charset="0"/>
-                <a:ea typeface="Consolas" pitchFamily="34" charset="-122"/>
-                <a:cs typeface="Consolas" pitchFamily="34" charset="-120"/>
-              </a:rPr>
-              <a:t>zplus-server</a:t>
-            </a:r>
-            <a:endParaRPr lang="en-US" sz="1350" dirty="0"/>
+                <a:latin typeface="Calibri" pitchFamily="34" charset="0"/>
+                <a:ea typeface="Calibri" pitchFamily="34" charset="-122"/>
+                <a:cs typeface="Calibri" pitchFamily="34" charset="-120"/>
+              </a:rPr>
+              <a:t>Audio &amp; video</a:t>
+            </a:r>
+            <a:endParaRPr lang="en-US" sz="1400" dirty="0"/>
           </a:p>
         </p:txBody>
       </p:sp>
@@ -7657,8 +8048,8 @@
         </p:nvSpPr>
         <p:spPr>
           <a:xfrm>
-            <a:off x="685800" y="2057400"/>
-            <a:ext cx="2121408" cy="2103120"/>
+            <a:off x="685800" y="2011680"/>
+            <a:ext cx="2121408" cy="1965960"/>
           </a:xfrm>
           <a:prstGeom prst="rect">
             <a:avLst/>
@@ -7686,7 +8077,7 @@
                 <a:ea typeface="Calibri" pitchFamily="34" charset="-122"/>
                 <a:cs typeface="Calibri" pitchFamily="34" charset="-120"/>
               </a:rPr>
-              <a:t>The full server — identical features</a:t>
+              <a:t>Peer-to-peer between participants</a:t>
             </a:r>
             <a:endParaRPr lang="en-US" sz="1050" dirty="0"/>
           </a:p>
@@ -7707,7 +8098,7 @@
                 <a:ea typeface="Calibri" pitchFamily="34" charset="-122"/>
                 <a:cs typeface="Calibri" pitchFamily="34" charset="-120"/>
               </a:rPr>
-              <a:t>Same zplus.db, zplus.key and environment overrides</a:t>
+              <a:t>DTLS-SRTP (standard WebRTC encryption)</a:t>
             </a:r>
             <a:endParaRPr lang="en-US" sz="1050" dirty="0"/>
           </a:p>
@@ -7728,31 +8119,10 @@
                 <a:ea typeface="Calibri" pitchFamily="34" charset="-122"/>
                 <a:cs typeface="Calibri" pitchFamily="34" charset="-120"/>
               </a:rPr>
-              <a:t>Open TCP 5199 (ufw allow 5199/tcp)</a:t>
+              <a:t>Media never touches the server</a:t>
             </a:r>
             <a:endParaRPr lang="en-US" sz="1050" dirty="0"/>
           </a:p>
-          <a:p>
-            <a:pPr marL="342900" indent="-342900">
-              <a:spcAft>
-                <a:spcPts val="600"/>
-              </a:spcAft>
-              <a:buSzPct val="100000"/>
-              <a:buChar char="•"/>
-            </a:pPr>
-            <a:r>
-              <a:rPr lang="en-US" sz="1050" dirty="0">
-                <a:solidFill>
-                  <a:srgbClr val="C9CED6"/>
-                </a:solidFill>
-                <a:latin typeface="Calibri" pitchFamily="34" charset="0"/>
-                <a:ea typeface="Calibri" pitchFamily="34" charset="-122"/>
-                <a:cs typeface="Calibri" pitchFamily="34" charset="-120"/>
-              </a:rPr>
-              <a:t>Windows &amp; Linux clients mix freely</a:t>
-            </a:r>
-            <a:endParaRPr lang="en-US" sz="1050" dirty="0"/>
-          </a:p>
         </p:txBody>
       </p:sp>
       <p:sp>
@@ -7764,7 +8134,7 @@
         <p:spPr>
           <a:xfrm>
             <a:off x="3273552" y="1188720"/>
-            <a:ext cx="2578608" cy="3063240"/>
+            <a:ext cx="2578608" cy="2926080"/>
           </a:xfrm>
           <a:prstGeom prst="roundRect">
             <a:avLst>
@@ -7853,17 +8223,17 @@
               <a:buNone/>
             </a:pPr>
             <a:r>
-              <a:rPr lang="en-US" sz="1350" b="1" dirty="0">
+              <a:rPr lang="en-US" sz="1400" b="1" dirty="0">
                 <a:solidFill>
                   <a:srgbClr val="F2F2F2"/>
                 </a:solidFill>
-                <a:latin typeface="Consolas" pitchFamily="34" charset="0"/>
-                <a:ea typeface="Consolas" pitchFamily="34" charset="-122"/>
-                <a:cs typeface="Consolas" pitchFamily="34" charset="-120"/>
-              </a:rPr>
-              <a:t>zplus-admin</a:t>
-            </a:r>
-            <a:endParaRPr lang="en-US" sz="1350" dirty="0"/>
+                <a:latin typeface="Calibri" pitchFamily="34" charset="0"/>
+                <a:ea typeface="Calibri" pitchFamily="34" charset="-122"/>
+                <a:cs typeface="Calibri" pitchFamily="34" charset="-120"/>
+              </a:rPr>
+              <a:t>Chat</a:t>
+            </a:r>
+            <a:endParaRPr lang="en-US" sz="1400" dirty="0"/>
           </a:p>
         </p:txBody>
       </p:sp>
@@ -7875,8 +8245,8 @@
         </p:nvSpPr>
         <p:spPr>
           <a:xfrm>
-            <a:off x="3502152" y="2057400"/>
-            <a:ext cx="2121408" cy="2103120"/>
+            <a:off x="3502152" y="2011680"/>
+            <a:ext cx="2121408" cy="1965960"/>
           </a:xfrm>
           <a:prstGeom prst="rect">
             <a:avLst/>
@@ -7904,7 +8274,7 @@
                 <a:ea typeface="Calibri" pitchFamily="34" charset="-122"/>
                 <a:cs typeface="Calibri" pitchFamily="34" charset="-120"/>
               </a:rPr>
-              <a:t>Everything the admin GUI does, scriptable</a:t>
+              <a:t>AES-256-GCM with a per-meeting key</a:t>
             </a:r>
             <a:endParaRPr lang="en-US" sz="1050" dirty="0"/>
           </a:p>
@@ -7925,7 +8295,7 @@
                 <a:ea typeface="Calibri" pitchFamily="34" charset="-122"/>
                 <a:cs typeface="Calibri" pitchFamily="34" charset="-120"/>
               </a:rPr>
-              <a:t>users list / create / update / reset-password</a:t>
+              <a:t>Key exchanged participant-to-participant via ECDH (P-256)</a:t>
             </a:r>
             <a:endParaRPr lang="en-US" sz="1050" dirty="0"/>
           </a:p>
@@ -7946,31 +8316,10 @@
                 <a:ea typeface="Calibri" pitchFamily="34" charset="-122"/>
                 <a:cs typeface="Calibri" pitchFamily="34" charset="-120"/>
               </a:rPr>
-              <a:t>settings get / set · meetings list / end</a:t>
+              <a:t>Server relays &amp; stores only ZE1$… ciphertext</a:t>
             </a:r>
             <a:endParaRPr lang="en-US" sz="1050" dirty="0"/>
           </a:p>
-          <a:p>
-            <a:pPr marL="342900" indent="-342900">
-              <a:spcAft>
-                <a:spcPts val="600"/>
-              </a:spcAft>
-              <a:buSzPct val="100000"/>
-              <a:buChar char="•"/>
-            </a:pPr>
-            <a:r>
-              <a:rPr lang="en-US" sz="1050" dirty="0">
-                <a:solidFill>
-                  <a:srgbClr val="C9CED6"/>
-                </a:solidFill>
-                <a:latin typeface="Calibri" pitchFamily="34" charset="0"/>
-                <a:ea typeface="Calibri" pitchFamily="34" charset="-122"/>
-                <a:cs typeface="Calibri" pitchFamily="34" charset="-120"/>
-              </a:rPr>
-              <a:t>Credentials via flags, env vars or prompts</a:t>
-            </a:r>
-            <a:endParaRPr lang="en-US" sz="1050" dirty="0"/>
-          </a:p>
         </p:txBody>
       </p:sp>
       <p:sp>
@@ -7982,7 +8331,7 @@
         <p:spPr>
           <a:xfrm>
             <a:off x="6089904" y="1188720"/>
-            <a:ext cx="2578608" cy="3063240"/>
+            <a:ext cx="2578608" cy="2926080"/>
           </a:xfrm>
           <a:prstGeom prst="roundRect">
             <a:avLst>
@@ -8071,17 +8420,17 @@
               <a:buNone/>
             </a:pPr>
             <a:r>
-              <a:rPr lang="en-US" sz="1350" b="1" dirty="0">
+              <a:rPr lang="en-US" sz="1400" b="1" dirty="0">
                 <a:solidFill>
                   <a:srgbClr val="F2F2F2"/>
                 </a:solidFill>
-                <a:latin typeface="Consolas" pitchFamily="34" charset="0"/>
-                <a:ea typeface="Consolas" pitchFamily="34" charset="-122"/>
-                <a:cs typeface="Consolas" pitchFamily="34" charset="-120"/>
-              </a:rPr>
-              <a:t>zplus-client</a:t>
-            </a:r>
-            <a:endParaRPr lang="en-US" sz="1350" dirty="0"/>
+                <a:latin typeface="Calibri" pitchFamily="34" charset="0"/>
+                <a:ea typeface="Calibri" pitchFamily="34" charset="-122"/>
+                <a:cs typeface="Calibri" pitchFamily="34" charset="-120"/>
+              </a:rPr>
+              <a:t>What the server knows</a:t>
+            </a:r>
+            <a:endParaRPr lang="en-US" sz="1400" dirty="0"/>
           </a:p>
         </p:txBody>
       </p:sp>
@@ -8093,8 +8442,8 @@
         </p:nvSpPr>
         <p:spPr>
           <a:xfrm>
-            <a:off x="6318504" y="2057400"/>
-            <a:ext cx="2121408" cy="2103120"/>
+            <a:off x="6318504" y="2011680"/>
+            <a:ext cx="2121408" cy="1965960"/>
           </a:xfrm>
           <a:prstGeom prst="rect">
             <a:avLst/>
@@ -8122,7 +8471,7 @@
                 <a:ea typeface="Calibri" pitchFamily="34" charset="-122"/>
                 <a:cs typeface="Calibri" pitchFamily="34" charset="-120"/>
               </a:rPr>
-              <a:t>Console meeting client for Linux users</a:t>
+              <a:t>Metadata only: accounts, meeting codes, join times</a:t>
             </a:r>
             <a:endParaRPr lang="en-US" sz="1050" dirty="0"/>
           </a:p>
@@ -8143,7 +8492,7 @@
                 <a:ea typeface="Calibri" pitchFamily="34" charset="-122"/>
                 <a:cs typeface="Calibri" pitchFamily="34" charset="-120"/>
               </a:rPr>
-              <a:t>Start / join meetings, roster, chat</a:t>
+              <a:t>Stored chat history stays ciphertext</a:t>
             </a:r>
             <a:endParaRPr lang="en-US" sz="1050" dirty="0"/>
           </a:p>
@@ -8164,28 +8513,7 @@
                 <a:ea typeface="Calibri" pitchFamily="34" charset="-122"/>
                 <a:cs typeface="Calibri" pitchFamily="34" charset="-120"/>
               </a:rPr>
-              <a:t>/who · /msg · /end · /leave</a:t>
-            </a:r>
-            <a:endParaRPr lang="en-US" sz="1050" dirty="0"/>
-          </a:p>
-          <a:p>
-            <a:pPr marL="342900" indent="-342900">
-              <a:spcAft>
-                <a:spcPts val="600"/>
-              </a:spcAft>
-              <a:buSzPct val="100000"/>
-              <a:buChar char="•"/>
-            </a:pPr>
-            <a:r>
-              <a:rPr lang="en-US" sz="1050" dirty="0">
-                <a:solidFill>
-                  <a:srgbClr val="C9CED6"/>
-                </a:solidFill>
-                <a:latin typeface="Calibri" pitchFamily="34" charset="0"/>
-                <a:ea typeface="Calibri" pitchFamily="34" charset="-122"/>
-                <a:cs typeface="Calibri" pitchFamily="34" charset="-120"/>
-              </a:rPr>
-              <a:t>No audio/video — chat participation</a:t>
+              <a:t>Admins and DB access can't read messages</a:t>
             </a:r>
             <a:endParaRPr lang="en-US" sz="1050" dirty="0"/>
           </a:p>
@@ -8268,7 +8596,7 @@
                 <a:ea typeface="Calibri" pitchFamily="34" charset="-122"/>
                 <a:cs typeface="Calibri" pitchFamily="34" charset="-120"/>
               </a:rPr>
-              <a:t>The console tools also run on Windows — handy for scripting admin tasks on either platform.</a:t>
+              <a:t>The 🔒 badge in the meeting header confirms encryption is active — the key is agreed the moment a participant joins.</a:t>
             </a:r>
             <a:endParaRPr lang="en-US" sz="1100" dirty="0"/>
           </a:p>
@@ -8339,6 +8667,853 @@
                 <a:ea typeface="Arial" pitchFamily="34" charset="-122"/>
                 <a:cs typeface="Arial" pitchFamily="34" charset="-120"/>
               </a:rPr>
+              <a:t>Z+ on Linux</a:t>
+            </a:r>
+            <a:endParaRPr lang="en-US" sz="3000" dirty="0"/>
+          </a:p>
+        </p:txBody>
+      </p:sp>
+      <p:sp>
+        <p:nvSpPr>
+          <p:cNvPr id="3" name="Text 1"/>
+          <p:cNvSpPr/>
+          <p:nvPr/>
+        </p:nvSpPr>
+        <p:spPr>
+          <a:xfrm>
+            <a:off x="457200" y="749808"/>
+            <a:ext cx="8229600" cy="274320"/>
+          </a:xfrm>
+          <a:prstGeom prst="rect">
+            <a:avLst/>
+          </a:prstGeom>
+          <a:noFill/>
+          <a:ln/>
+        </p:spPr>
+        <p:txBody>
+          <a:bodyPr wrap="square" lIns="0" tIns="0" rIns="0" bIns="0" rtlCol="0" anchor="ctr"/>
+          <a:lstStyle/>
+          <a:p>
+            <a:pPr indent="0" marL="0">
+              <a:buNone/>
+            </a:pPr>
+            <a:r>
+              <a:rPr lang="en-US" sz="1200" dirty="0">
+                <a:solidFill>
+                  <a:srgbClr val="9AA0AA"/>
+                </a:solidFill>
+                <a:latin typeface="Calibri" pitchFamily="34" charset="0"/>
+                <a:ea typeface="Calibri" pitchFamily="34" charset="-122"/>
+                <a:cs typeface="Calibri" pitchFamily="34" charset="-120"/>
+              </a:rPr>
+              <a:t>Three self-contained x64 binaries in publish/linux — no .NET install; chmod +x and run.</a:t>
+            </a:r>
+            <a:endParaRPr lang="en-US" sz="1200" dirty="0"/>
+          </a:p>
+        </p:txBody>
+      </p:sp>
+      <p:sp>
+        <p:nvSpPr>
+          <p:cNvPr id="4" name="Shape 2"/>
+          <p:cNvSpPr/>
+          <p:nvPr/>
+        </p:nvSpPr>
+        <p:spPr>
+          <a:xfrm>
+            <a:off x="457200" y="1188720"/>
+            <a:ext cx="2578608" cy="3063240"/>
+          </a:xfrm>
+          <a:prstGeom prst="roundRect">
+            <a:avLst>
+              <a:gd name="adj" fmla="val 2837"/>
+            </a:avLst>
+          </a:prstGeom>
+          <a:solidFill>
+            <a:srgbClr val="24262E"/>
+          </a:solidFill>
+          <a:ln/>
+          <a:effectLst>
+            <a:outerShdw sx="100000" sy="100000" kx="0" ky="0" algn="bl" rotWithShape="0" blurRad="101600" dist="38100" dir="5400000">
+              <a:srgbClr val="000000">
+                <a:alpha val="35000"/>
+              </a:srgbClr>
+            </a:outerShdw>
+          </a:effectLst>
+        </p:spPr>
+      </p:sp>
+      <p:sp>
+        <p:nvSpPr>
+          <p:cNvPr id="5" name="Shape 3"/>
+          <p:cNvSpPr/>
+          <p:nvPr/>
+        </p:nvSpPr>
+        <p:spPr>
+          <a:xfrm>
+            <a:off x="685800" y="1389888"/>
+            <a:ext cx="457200" cy="457200"/>
+          </a:xfrm>
+          <a:prstGeom prst="ellipse">
+            <a:avLst/>
+          </a:prstGeom>
+          <a:solidFill>
+            <a:srgbClr val="2D8CFF"/>
+          </a:solidFill>
+          <a:ln/>
+        </p:spPr>
+      </p:sp>
+      <p:pic>
+        <p:nvPicPr>
+          <p:cNvPr id="6" name="Image 0" descr="preencoded.png">    </p:cNvPr>
+          <p:cNvPicPr>
+            <a:picLocks noChangeAspect="1"/>
+          </p:cNvPicPr>
+          <p:nvPr/>
+        </p:nvPicPr>
+        <p:blipFill>
+          <a:blip r:embed="rId1"/>
+          <a:stretch>
+            <a:fillRect/>
+          </a:stretch>
+        </p:blipFill>
+        <p:spPr>
+          <a:xfrm>
+            <a:off x="804672" y="1508760"/>
+            <a:ext cx="219456" cy="219456"/>
+          </a:xfrm>
+          <a:prstGeom prst="rect">
+            <a:avLst/>
+          </a:prstGeom>
+        </p:spPr>
+      </p:pic>
+      <p:sp>
+        <p:nvSpPr>
+          <p:cNvPr id="7" name="Text 4"/>
+          <p:cNvSpPr/>
+          <p:nvPr/>
+        </p:nvSpPr>
+        <p:spPr>
+          <a:xfrm>
+            <a:off x="1280160" y="1463040"/>
+            <a:ext cx="1618488" cy="320040"/>
+          </a:xfrm>
+          <a:prstGeom prst="rect">
+            <a:avLst/>
+          </a:prstGeom>
+          <a:noFill/>
+          <a:ln/>
+        </p:spPr>
+        <p:txBody>
+          <a:bodyPr wrap="square" lIns="0" tIns="0" rIns="0" bIns="0" rtlCol="0" anchor="ctr"/>
+          <a:lstStyle/>
+          <a:p>
+            <a:pPr indent="0" marL="0">
+              <a:buNone/>
+            </a:pPr>
+            <a:r>
+              <a:rPr lang="en-US" sz="1350" b="1" dirty="0">
+                <a:solidFill>
+                  <a:srgbClr val="F2F2F2"/>
+                </a:solidFill>
+                <a:latin typeface="Consolas" pitchFamily="34" charset="0"/>
+                <a:ea typeface="Consolas" pitchFamily="34" charset="-122"/>
+                <a:cs typeface="Consolas" pitchFamily="34" charset="-120"/>
+              </a:rPr>
+              <a:t>zplus-server</a:t>
+            </a:r>
+            <a:endParaRPr lang="en-US" sz="1350" dirty="0"/>
+          </a:p>
+        </p:txBody>
+      </p:sp>
+      <p:sp>
+        <p:nvSpPr>
+          <p:cNvPr id="8" name="Text 5"/>
+          <p:cNvSpPr/>
+          <p:nvPr/>
+        </p:nvSpPr>
+        <p:spPr>
+          <a:xfrm>
+            <a:off x="685800" y="2057400"/>
+            <a:ext cx="2121408" cy="2103120"/>
+          </a:xfrm>
+          <a:prstGeom prst="rect">
+            <a:avLst/>
+          </a:prstGeom>
+          <a:noFill/>
+          <a:ln/>
+        </p:spPr>
+        <p:txBody>
+          <a:bodyPr wrap="square" lIns="0" tIns="0" rIns="0" bIns="0" rtlCol="0" anchor="t"/>
+          <a:lstStyle/>
+          <a:p>
+            <a:pPr marL="342900" indent="-342900">
+              <a:spcAft>
+                <a:spcPts val="600"/>
+              </a:spcAft>
+              <a:buSzPct val="100000"/>
+              <a:buChar char="•"/>
+            </a:pPr>
+            <a:r>
+              <a:rPr lang="en-US" sz="1050" dirty="0">
+                <a:solidFill>
+                  <a:srgbClr val="C9CED6"/>
+                </a:solidFill>
+                <a:latin typeface="Calibri" pitchFamily="34" charset="0"/>
+                <a:ea typeface="Calibri" pitchFamily="34" charset="-122"/>
+                <a:cs typeface="Calibri" pitchFamily="34" charset="-120"/>
+              </a:rPr>
+              <a:t>The full server — identical features</a:t>
+            </a:r>
+            <a:endParaRPr lang="en-US" sz="1050" dirty="0"/>
+          </a:p>
+          <a:p>
+            <a:pPr marL="342900" indent="-342900">
+              <a:spcAft>
+                <a:spcPts val="600"/>
+              </a:spcAft>
+              <a:buSzPct val="100000"/>
+              <a:buChar char="•"/>
+            </a:pPr>
+            <a:r>
+              <a:rPr lang="en-US" sz="1050" dirty="0">
+                <a:solidFill>
+                  <a:srgbClr val="C9CED6"/>
+                </a:solidFill>
+                <a:latin typeface="Calibri" pitchFamily="34" charset="0"/>
+                <a:ea typeface="Calibri" pitchFamily="34" charset="-122"/>
+                <a:cs typeface="Calibri" pitchFamily="34" charset="-120"/>
+              </a:rPr>
+              <a:t>Same zplus.db, zplus.key and environment overrides</a:t>
+            </a:r>
+            <a:endParaRPr lang="en-US" sz="1050" dirty="0"/>
+          </a:p>
+          <a:p>
+            <a:pPr marL="342900" indent="-342900">
+              <a:spcAft>
+                <a:spcPts val="600"/>
+              </a:spcAft>
+              <a:buSzPct val="100000"/>
+              <a:buChar char="•"/>
+            </a:pPr>
+            <a:r>
+              <a:rPr lang="en-US" sz="1050" dirty="0">
+                <a:solidFill>
+                  <a:srgbClr val="C9CED6"/>
+                </a:solidFill>
+                <a:latin typeface="Calibri" pitchFamily="34" charset="0"/>
+                <a:ea typeface="Calibri" pitchFamily="34" charset="-122"/>
+                <a:cs typeface="Calibri" pitchFamily="34" charset="-120"/>
+              </a:rPr>
+              <a:t>Open TCP 5199 (ufw allow 5199/tcp)</a:t>
+            </a:r>
+            <a:endParaRPr lang="en-US" sz="1050" dirty="0"/>
+          </a:p>
+          <a:p>
+            <a:pPr marL="342900" indent="-342900">
+              <a:spcAft>
+                <a:spcPts val="600"/>
+              </a:spcAft>
+              <a:buSzPct val="100000"/>
+              <a:buChar char="•"/>
+            </a:pPr>
+            <a:r>
+              <a:rPr lang="en-US" sz="1050" dirty="0">
+                <a:solidFill>
+                  <a:srgbClr val="C9CED6"/>
+                </a:solidFill>
+                <a:latin typeface="Calibri" pitchFamily="34" charset="0"/>
+                <a:ea typeface="Calibri" pitchFamily="34" charset="-122"/>
+                <a:cs typeface="Calibri" pitchFamily="34" charset="-120"/>
+              </a:rPr>
+              <a:t>Windows &amp; Linux clients mix freely</a:t>
+            </a:r>
+            <a:endParaRPr lang="en-US" sz="1050" dirty="0"/>
+          </a:p>
+        </p:txBody>
+      </p:sp>
+      <p:sp>
+        <p:nvSpPr>
+          <p:cNvPr id="9" name="Shape 6"/>
+          <p:cNvSpPr/>
+          <p:nvPr/>
+        </p:nvSpPr>
+        <p:spPr>
+          <a:xfrm>
+            <a:off x="3273552" y="1188720"/>
+            <a:ext cx="2578608" cy="3063240"/>
+          </a:xfrm>
+          <a:prstGeom prst="roundRect">
+            <a:avLst>
+              <a:gd name="adj" fmla="val 2837"/>
+            </a:avLst>
+          </a:prstGeom>
+          <a:solidFill>
+            <a:srgbClr val="24262E"/>
+          </a:solidFill>
+          <a:ln/>
+          <a:effectLst>
+            <a:outerShdw sx="100000" sy="100000" kx="0" ky="0" algn="bl" rotWithShape="0" blurRad="101600" dist="38100" dir="5400000">
+              <a:srgbClr val="000000">
+                <a:alpha val="35000"/>
+              </a:srgbClr>
+            </a:outerShdw>
+          </a:effectLst>
+        </p:spPr>
+      </p:sp>
+      <p:sp>
+        <p:nvSpPr>
+          <p:cNvPr id="10" name="Shape 7"/>
+          <p:cNvSpPr/>
+          <p:nvPr/>
+        </p:nvSpPr>
+        <p:spPr>
+          <a:xfrm>
+            <a:off x="3502152" y="1389888"/>
+            <a:ext cx="457200" cy="457200"/>
+          </a:xfrm>
+          <a:prstGeom prst="ellipse">
+            <a:avLst/>
+          </a:prstGeom>
+          <a:solidFill>
+            <a:srgbClr val="2D8CFF"/>
+          </a:solidFill>
+          <a:ln/>
+        </p:spPr>
+      </p:sp>
+      <p:pic>
+        <p:nvPicPr>
+          <p:cNvPr id="11" name="Image 1" descr="preencoded.png">    </p:cNvPr>
+          <p:cNvPicPr>
+            <a:picLocks noChangeAspect="1"/>
+          </p:cNvPicPr>
+          <p:nvPr/>
+        </p:nvPicPr>
+        <p:blipFill>
+          <a:blip r:embed="rId2"/>
+          <a:stretch>
+            <a:fillRect/>
+          </a:stretch>
+        </p:blipFill>
+        <p:spPr>
+          <a:xfrm>
+            <a:off x="3621024" y="1508760"/>
+            <a:ext cx="219456" cy="219456"/>
+          </a:xfrm>
+          <a:prstGeom prst="rect">
+            <a:avLst/>
+          </a:prstGeom>
+        </p:spPr>
+      </p:pic>
+      <p:sp>
+        <p:nvSpPr>
+          <p:cNvPr id="12" name="Text 8"/>
+          <p:cNvSpPr/>
+          <p:nvPr/>
+        </p:nvSpPr>
+        <p:spPr>
+          <a:xfrm>
+            <a:off x="4096512" y="1463040"/>
+            <a:ext cx="1618488" cy="320040"/>
+          </a:xfrm>
+          <a:prstGeom prst="rect">
+            <a:avLst/>
+          </a:prstGeom>
+          <a:noFill/>
+          <a:ln/>
+        </p:spPr>
+        <p:txBody>
+          <a:bodyPr wrap="square" lIns="0" tIns="0" rIns="0" bIns="0" rtlCol="0" anchor="ctr"/>
+          <a:lstStyle/>
+          <a:p>
+            <a:pPr indent="0" marL="0">
+              <a:buNone/>
+            </a:pPr>
+            <a:r>
+              <a:rPr lang="en-US" sz="1350" b="1" dirty="0">
+                <a:solidFill>
+                  <a:srgbClr val="F2F2F2"/>
+                </a:solidFill>
+                <a:latin typeface="Consolas" pitchFamily="34" charset="0"/>
+                <a:ea typeface="Consolas" pitchFamily="34" charset="-122"/>
+                <a:cs typeface="Consolas" pitchFamily="34" charset="-120"/>
+              </a:rPr>
+              <a:t>zplus-admin</a:t>
+            </a:r>
+            <a:endParaRPr lang="en-US" sz="1350" dirty="0"/>
+          </a:p>
+        </p:txBody>
+      </p:sp>
+      <p:sp>
+        <p:nvSpPr>
+          <p:cNvPr id="13" name="Text 9"/>
+          <p:cNvSpPr/>
+          <p:nvPr/>
+        </p:nvSpPr>
+        <p:spPr>
+          <a:xfrm>
+            <a:off x="3502152" y="2057400"/>
+            <a:ext cx="2121408" cy="2103120"/>
+          </a:xfrm>
+          <a:prstGeom prst="rect">
+            <a:avLst/>
+          </a:prstGeom>
+          <a:noFill/>
+          <a:ln/>
+        </p:spPr>
+        <p:txBody>
+          <a:bodyPr wrap="square" lIns="0" tIns="0" rIns="0" bIns="0" rtlCol="0" anchor="t"/>
+          <a:lstStyle/>
+          <a:p>
+            <a:pPr marL="342900" indent="-342900">
+              <a:spcAft>
+                <a:spcPts val="600"/>
+              </a:spcAft>
+              <a:buSzPct val="100000"/>
+              <a:buChar char="•"/>
+            </a:pPr>
+            <a:r>
+              <a:rPr lang="en-US" sz="1050" dirty="0">
+                <a:solidFill>
+                  <a:srgbClr val="C9CED6"/>
+                </a:solidFill>
+                <a:latin typeface="Calibri" pitchFamily="34" charset="0"/>
+                <a:ea typeface="Calibri" pitchFamily="34" charset="-122"/>
+                <a:cs typeface="Calibri" pitchFamily="34" charset="-120"/>
+              </a:rPr>
+              <a:t>Everything the admin GUI does, scriptable</a:t>
+            </a:r>
+            <a:endParaRPr lang="en-US" sz="1050" dirty="0"/>
+          </a:p>
+          <a:p>
+            <a:pPr marL="342900" indent="-342900">
+              <a:spcAft>
+                <a:spcPts val="600"/>
+              </a:spcAft>
+              <a:buSzPct val="100000"/>
+              <a:buChar char="•"/>
+            </a:pPr>
+            <a:r>
+              <a:rPr lang="en-US" sz="1050" dirty="0">
+                <a:solidFill>
+                  <a:srgbClr val="C9CED6"/>
+                </a:solidFill>
+                <a:latin typeface="Calibri" pitchFamily="34" charset="0"/>
+                <a:ea typeface="Calibri" pitchFamily="34" charset="-122"/>
+                <a:cs typeface="Calibri" pitchFamily="34" charset="-120"/>
+              </a:rPr>
+              <a:t>users list / create / update / reset-password</a:t>
+            </a:r>
+            <a:endParaRPr lang="en-US" sz="1050" dirty="0"/>
+          </a:p>
+          <a:p>
+            <a:pPr marL="342900" indent="-342900">
+              <a:spcAft>
+                <a:spcPts val="600"/>
+              </a:spcAft>
+              <a:buSzPct val="100000"/>
+              <a:buChar char="•"/>
+            </a:pPr>
+            <a:r>
+              <a:rPr lang="en-US" sz="1050" dirty="0">
+                <a:solidFill>
+                  <a:srgbClr val="C9CED6"/>
+                </a:solidFill>
+                <a:latin typeface="Calibri" pitchFamily="34" charset="0"/>
+                <a:ea typeface="Calibri" pitchFamily="34" charset="-122"/>
+                <a:cs typeface="Calibri" pitchFamily="34" charset="-120"/>
+              </a:rPr>
+              <a:t>settings get / set · meetings list / end</a:t>
+            </a:r>
+            <a:endParaRPr lang="en-US" sz="1050" dirty="0"/>
+          </a:p>
+          <a:p>
+            <a:pPr marL="342900" indent="-342900">
+              <a:spcAft>
+                <a:spcPts val="600"/>
+              </a:spcAft>
+              <a:buSzPct val="100000"/>
+              <a:buChar char="•"/>
+            </a:pPr>
+            <a:r>
+              <a:rPr lang="en-US" sz="1050" dirty="0">
+                <a:solidFill>
+                  <a:srgbClr val="C9CED6"/>
+                </a:solidFill>
+                <a:latin typeface="Calibri" pitchFamily="34" charset="0"/>
+                <a:ea typeface="Calibri" pitchFamily="34" charset="-122"/>
+                <a:cs typeface="Calibri" pitchFamily="34" charset="-120"/>
+              </a:rPr>
+              <a:t>Credentials via flags, env vars or prompts</a:t>
+            </a:r>
+            <a:endParaRPr lang="en-US" sz="1050" dirty="0"/>
+          </a:p>
+        </p:txBody>
+      </p:sp>
+      <p:sp>
+        <p:nvSpPr>
+          <p:cNvPr id="14" name="Shape 10"/>
+          <p:cNvSpPr/>
+          <p:nvPr/>
+        </p:nvSpPr>
+        <p:spPr>
+          <a:xfrm>
+            <a:off x="6089904" y="1188720"/>
+            <a:ext cx="2578608" cy="3063240"/>
+          </a:xfrm>
+          <a:prstGeom prst="roundRect">
+            <a:avLst>
+              <a:gd name="adj" fmla="val 2837"/>
+            </a:avLst>
+          </a:prstGeom>
+          <a:solidFill>
+            <a:srgbClr val="24262E"/>
+          </a:solidFill>
+          <a:ln/>
+          <a:effectLst>
+            <a:outerShdw sx="100000" sy="100000" kx="0" ky="0" algn="bl" rotWithShape="0" blurRad="101600" dist="38100" dir="5400000">
+              <a:srgbClr val="000000">
+                <a:alpha val="35000"/>
+              </a:srgbClr>
+            </a:outerShdw>
+          </a:effectLst>
+        </p:spPr>
+      </p:sp>
+      <p:sp>
+        <p:nvSpPr>
+          <p:cNvPr id="15" name="Shape 11"/>
+          <p:cNvSpPr/>
+          <p:nvPr/>
+        </p:nvSpPr>
+        <p:spPr>
+          <a:xfrm>
+            <a:off x="6318504" y="1389888"/>
+            <a:ext cx="457200" cy="457200"/>
+          </a:xfrm>
+          <a:prstGeom prst="ellipse">
+            <a:avLst/>
+          </a:prstGeom>
+          <a:solidFill>
+            <a:srgbClr val="2D8CFF"/>
+          </a:solidFill>
+          <a:ln/>
+        </p:spPr>
+      </p:sp>
+      <p:pic>
+        <p:nvPicPr>
+          <p:cNvPr id="16" name="Image 2" descr="preencoded.png">    </p:cNvPr>
+          <p:cNvPicPr>
+            <a:picLocks noChangeAspect="1"/>
+          </p:cNvPicPr>
+          <p:nvPr/>
+        </p:nvPicPr>
+        <p:blipFill>
+          <a:blip r:embed="rId3"/>
+          <a:stretch>
+            <a:fillRect/>
+          </a:stretch>
+        </p:blipFill>
+        <p:spPr>
+          <a:xfrm>
+            <a:off x="6437376" y="1508760"/>
+            <a:ext cx="219456" cy="219456"/>
+          </a:xfrm>
+          <a:prstGeom prst="rect">
+            <a:avLst/>
+          </a:prstGeom>
+        </p:spPr>
+      </p:pic>
+      <p:sp>
+        <p:nvSpPr>
+          <p:cNvPr id="17" name="Text 12"/>
+          <p:cNvSpPr/>
+          <p:nvPr/>
+        </p:nvSpPr>
+        <p:spPr>
+          <a:xfrm>
+            <a:off x="6912864" y="1463040"/>
+            <a:ext cx="1618488" cy="320040"/>
+          </a:xfrm>
+          <a:prstGeom prst="rect">
+            <a:avLst/>
+          </a:prstGeom>
+          <a:noFill/>
+          <a:ln/>
+        </p:spPr>
+        <p:txBody>
+          <a:bodyPr wrap="square" lIns="0" tIns="0" rIns="0" bIns="0" rtlCol="0" anchor="ctr"/>
+          <a:lstStyle/>
+          <a:p>
+            <a:pPr indent="0" marL="0">
+              <a:buNone/>
+            </a:pPr>
+            <a:r>
+              <a:rPr lang="en-US" sz="1350" b="1" dirty="0">
+                <a:solidFill>
+                  <a:srgbClr val="F2F2F2"/>
+                </a:solidFill>
+                <a:latin typeface="Consolas" pitchFamily="34" charset="0"/>
+                <a:ea typeface="Consolas" pitchFamily="34" charset="-122"/>
+                <a:cs typeface="Consolas" pitchFamily="34" charset="-120"/>
+              </a:rPr>
+              <a:t>zplus-client</a:t>
+            </a:r>
+            <a:endParaRPr lang="en-US" sz="1350" dirty="0"/>
+          </a:p>
+        </p:txBody>
+      </p:sp>
+      <p:sp>
+        <p:nvSpPr>
+          <p:cNvPr id="18" name="Text 13"/>
+          <p:cNvSpPr/>
+          <p:nvPr/>
+        </p:nvSpPr>
+        <p:spPr>
+          <a:xfrm>
+            <a:off x="6318504" y="2057400"/>
+            <a:ext cx="2121408" cy="2103120"/>
+          </a:xfrm>
+          <a:prstGeom prst="rect">
+            <a:avLst/>
+          </a:prstGeom>
+          <a:noFill/>
+          <a:ln/>
+        </p:spPr>
+        <p:txBody>
+          <a:bodyPr wrap="square" lIns="0" tIns="0" rIns="0" bIns="0" rtlCol="0" anchor="t"/>
+          <a:lstStyle/>
+          <a:p>
+            <a:pPr marL="342900" indent="-342900">
+              <a:spcAft>
+                <a:spcPts val="600"/>
+              </a:spcAft>
+              <a:buSzPct val="100000"/>
+              <a:buChar char="•"/>
+            </a:pPr>
+            <a:r>
+              <a:rPr lang="en-US" sz="1050" dirty="0">
+                <a:solidFill>
+                  <a:srgbClr val="C9CED6"/>
+                </a:solidFill>
+                <a:latin typeface="Calibri" pitchFamily="34" charset="0"/>
+                <a:ea typeface="Calibri" pitchFamily="34" charset="-122"/>
+                <a:cs typeface="Calibri" pitchFamily="34" charset="-120"/>
+              </a:rPr>
+              <a:t>Console meeting client for Linux users</a:t>
+            </a:r>
+            <a:endParaRPr lang="en-US" sz="1050" dirty="0"/>
+          </a:p>
+          <a:p>
+            <a:pPr marL="342900" indent="-342900">
+              <a:spcAft>
+                <a:spcPts val="600"/>
+              </a:spcAft>
+              <a:buSzPct val="100000"/>
+              <a:buChar char="•"/>
+            </a:pPr>
+            <a:r>
+              <a:rPr lang="en-US" sz="1050" dirty="0">
+                <a:solidFill>
+                  <a:srgbClr val="C9CED6"/>
+                </a:solidFill>
+                <a:latin typeface="Calibri" pitchFamily="34" charset="0"/>
+                <a:ea typeface="Calibri" pitchFamily="34" charset="-122"/>
+                <a:cs typeface="Calibri" pitchFamily="34" charset="-120"/>
+              </a:rPr>
+              <a:t>Start / join meetings, roster, chat</a:t>
+            </a:r>
+            <a:endParaRPr lang="en-US" sz="1050" dirty="0"/>
+          </a:p>
+          <a:p>
+            <a:pPr marL="342900" indent="-342900">
+              <a:spcAft>
+                <a:spcPts val="600"/>
+              </a:spcAft>
+              <a:buSzPct val="100000"/>
+              <a:buChar char="•"/>
+            </a:pPr>
+            <a:r>
+              <a:rPr lang="en-US" sz="1050" dirty="0">
+                <a:solidFill>
+                  <a:srgbClr val="C9CED6"/>
+                </a:solidFill>
+                <a:latin typeface="Calibri" pitchFamily="34" charset="0"/>
+                <a:ea typeface="Calibri" pitchFamily="34" charset="-122"/>
+                <a:cs typeface="Calibri" pitchFamily="34" charset="-120"/>
+              </a:rPr>
+              <a:t>/who · /msg · /end · /leave</a:t>
+            </a:r>
+            <a:endParaRPr lang="en-US" sz="1050" dirty="0"/>
+          </a:p>
+          <a:p>
+            <a:pPr marL="342900" indent="-342900">
+              <a:spcAft>
+                <a:spcPts val="600"/>
+              </a:spcAft>
+              <a:buSzPct val="100000"/>
+              <a:buChar char="•"/>
+            </a:pPr>
+            <a:r>
+              <a:rPr lang="en-US" sz="1050" dirty="0">
+                <a:solidFill>
+                  <a:srgbClr val="C9CED6"/>
+                </a:solidFill>
+                <a:latin typeface="Calibri" pitchFamily="34" charset="0"/>
+                <a:ea typeface="Calibri" pitchFamily="34" charset="-122"/>
+                <a:cs typeface="Calibri" pitchFamily="34" charset="-120"/>
+              </a:rPr>
+              <a:t>No audio/video — chat participation</a:t>
+            </a:r>
+            <a:endParaRPr lang="en-US" sz="1050" dirty="0"/>
+          </a:p>
+        </p:txBody>
+      </p:sp>
+      <p:sp>
+        <p:nvSpPr>
+          <p:cNvPr id="19" name="Shape 14"/>
+          <p:cNvSpPr/>
+          <p:nvPr/>
+        </p:nvSpPr>
+        <p:spPr>
+          <a:xfrm>
+            <a:off x="457200" y="4617720"/>
+            <a:ext cx="329184" cy="329184"/>
+          </a:xfrm>
+          <a:prstGeom prst="ellipse">
+            <a:avLst/>
+          </a:prstGeom>
+          <a:solidFill>
+            <a:srgbClr val="2D8CFF"/>
+          </a:solidFill>
+          <a:ln/>
+        </p:spPr>
+      </p:sp>
+      <p:pic>
+        <p:nvPicPr>
+          <p:cNvPr id="20" name="Image 3" descr="preencoded.png">    </p:cNvPr>
+          <p:cNvPicPr>
+            <a:picLocks noChangeAspect="1"/>
+          </p:cNvPicPr>
+          <p:nvPr/>
+        </p:nvPicPr>
+        <p:blipFill>
+          <a:blip r:embed="rId4"/>
+          <a:stretch>
+            <a:fillRect/>
+          </a:stretch>
+        </p:blipFill>
+        <p:spPr>
+          <a:xfrm>
+            <a:off x="542788" y="4703308"/>
+            <a:ext cx="158008" cy="158008"/>
+          </a:xfrm>
+          <a:prstGeom prst="rect">
+            <a:avLst/>
+          </a:prstGeom>
+        </p:spPr>
+      </p:pic>
+      <p:sp>
+        <p:nvSpPr>
+          <p:cNvPr id="21" name="Text 15"/>
+          <p:cNvSpPr/>
+          <p:nvPr/>
+        </p:nvSpPr>
+        <p:spPr>
+          <a:xfrm>
+            <a:off x="914400" y="4599432"/>
+            <a:ext cx="7772400" cy="384048"/>
+          </a:xfrm>
+          <a:prstGeom prst="rect">
+            <a:avLst/>
+          </a:prstGeom>
+          <a:noFill/>
+          <a:ln/>
+        </p:spPr>
+        <p:txBody>
+          <a:bodyPr wrap="square" lIns="0" tIns="0" rIns="0" bIns="0" rtlCol="0" anchor="ctr"/>
+          <a:lstStyle/>
+          <a:p>
+            <a:pPr indent="0" marL="0">
+              <a:buNone/>
+            </a:pPr>
+            <a:r>
+              <a:rPr lang="en-US" sz="1100" i="1" dirty="0">
+                <a:solidFill>
+                  <a:srgbClr val="9AA0AA"/>
+                </a:solidFill>
+                <a:latin typeface="Calibri" pitchFamily="34" charset="0"/>
+                <a:ea typeface="Calibri" pitchFamily="34" charset="-122"/>
+                <a:cs typeface="Calibri" pitchFamily="34" charset="-120"/>
+              </a:rPr>
+              <a:t>The console tools also run on Windows — handy for scripting admin tasks on either platform.</a:t>
+            </a:r>
+            <a:endParaRPr lang="en-US" sz="1100" dirty="0"/>
+          </a:p>
+        </p:txBody>
+      </p:sp>
+    </p:spTree>
+  </p:cSld>
+  <p:clrMapOvr>
+    <a:masterClrMapping/>
+  </p:clrMapOvr>
+</p:sld>
+</file>
+
+<file path=ppt/slides/slide18.xml><?xml version="1.0" encoding="utf-8"?>
+<p:sld xmlns:a="http://schemas.openxmlformats.org/drawingml/2006/main" xmlns:r="http://schemas.openxmlformats.org/officeDocument/2006/relationships" xmlns:p="http://schemas.openxmlformats.org/presentationml/2006/main">
+  <p:cSld name="Slide 18">
+    <p:bg>
+      <p:bgPr>
+        <a:solidFill>
+          <a:srgbClr val="1B1D22"/>
+        </a:solidFill>
+      </p:bgPr>
+    </p:bg>
+    <p:spTree>
+      <p:nvGrpSpPr>
+        <p:cNvPr id="1" name=""/>
+        <p:cNvGrpSpPr/>
+        <p:nvPr/>
+      </p:nvGrpSpPr>
+      <p:grpSpPr>
+        <a:xfrm>
+          <a:off x="0" y="0"/>
+          <a:ext cx="0" cy="0"/>
+          <a:chOff x="0" y="0"/>
+          <a:chExt cx="0" cy="0"/>
+        </a:xfrm>
+      </p:grpSpPr>
+      <p:sp>
+        <p:nvSpPr>
+          <p:cNvPr id="2" name="Text 0"/>
+          <p:cNvSpPr/>
+          <p:nvPr/>
+        </p:nvSpPr>
+        <p:spPr>
+          <a:xfrm>
+            <a:off x="457200" y="256032"/>
+            <a:ext cx="8229600" cy="548640"/>
+          </a:xfrm>
+          <a:prstGeom prst="rect">
+            <a:avLst/>
+          </a:prstGeom>
+          <a:noFill/>
+          <a:ln/>
+        </p:spPr>
+        <p:txBody>
+          <a:bodyPr wrap="square" lIns="0" tIns="0" rIns="0" bIns="0" rtlCol="0" anchor="ctr"/>
+          <a:lstStyle/>
+          <a:p>
+            <a:pPr indent="0" marL="0">
+              <a:buNone/>
+            </a:pPr>
+            <a:r>
+              <a:rPr lang="en-US" sz="3000" b="1" dirty="0">
+                <a:solidFill>
+                  <a:srgbClr val="F2F2F2"/>
+                </a:solidFill>
+                <a:latin typeface="Arial" pitchFamily="34" charset="0"/>
+                <a:ea typeface="Arial" pitchFamily="34" charset="-122"/>
+                <a:cs typeface="Arial" pitchFamily="34" charset="-120"/>
+              </a:rPr>
               <a:t>Quick reference</a:t>
             </a:r>
             <a:endParaRPr lang="en-US" sz="3000" dirty="0"/>
@@ -8347,7 +9522,7 @@
       </p:sp>
       <p:graphicFrame>
         <p:nvGraphicFramePr>
-          <p:cNvPr id="18" name="Table 0"/>
+          <p:cNvPr id="19" name="Table 0"/>
           <p:cNvGraphicFramePr>
             <a:graphicFrameLocks noGrp="1"/>
           </p:cNvGraphicFramePr>
@@ -9475,6 +10650,144 @@
                   </a:tcPr>
                 </a:tc>
               </a:tr>
+              <a:tr h="365760">
+                <a:tc>
+                  <a:txBody>
+                    <a:bodyPr/>
+                    <a:lstStyle/>
+                    <a:p>
+                      <a:pPr indent="0" marL="0">
+                        <a:buNone/>
+                      </a:pPr>
+                      <a:r>
+                        <a:rPr lang="en-US" sz="1050" dirty="0">
+                          <a:solidFill>
+                            <a:srgbClr val="C9CED6"/>
+                          </a:solidFill>
+                          <a:latin typeface="Calibri" pitchFamily="34" charset="0"/>
+                          <a:ea typeface="Calibri" pitchFamily="34" charset="-122"/>
+                          <a:cs typeface="Calibri" pitchFamily="34" charset="-120"/>
+                        </a:rPr>
+                        <a:t>Encryption</a:t>
+                      </a:r>
+                      <a:endParaRPr lang="en-US" sz="1050" dirty="0">
+                        <a:latin typeface="Calibri" charset="0"/>
+                        <a:ea typeface="Calibri" charset="0"/>
+                        <a:cs typeface="Calibri" charset="0"/>
+                      </a:endParaRPr>
+                    </a:p>
+                  </a:txBody>
+                  <a:tcPr marL="64008" marR="64008" marT="64008" marB="64008" anchor="ctr">
+                    <a:lnL w="6350" cap="flat" cmpd="sng" algn="ctr">
+                      <a:solidFill>
+                        <a:srgbClr val="3A3D46"/>
+                      </a:solidFill>
+                      <a:prstDash val="solid"/>
+                      <a:round/>
+                      <a:headEnd type="none" w="med" len="med"/>
+                      <a:tailEnd type="none" w="med" len="med"/>
+                    </a:lnL>
+                    <a:lnR w="6350" cap="flat" cmpd="sng" algn="ctr">
+                      <a:solidFill>
+                        <a:srgbClr val="3A3D46"/>
+                      </a:solidFill>
+                      <a:prstDash val="solid"/>
+                      <a:round/>
+                      <a:headEnd type="none" w="med" len="med"/>
+                      <a:tailEnd type="none" w="med" len="med"/>
+                    </a:lnR>
+                    <a:lnT w="6350" cap="flat" cmpd="sng" algn="ctr">
+                      <a:solidFill>
+                        <a:srgbClr val="3A3D46"/>
+                      </a:solidFill>
+                      <a:prstDash val="solid"/>
+                      <a:round/>
+                      <a:headEnd type="none" w="med" len="med"/>
+                      <a:tailEnd type="none" w="med" len="med"/>
+                    </a:lnT>
+                    <a:lnB w="6350" cap="flat" cmpd="sng" algn="ctr">
+                      <a:solidFill>
+                        <a:srgbClr val="3A3D46"/>
+                      </a:solidFill>
+                      <a:prstDash val="solid"/>
+                      <a:round/>
+                      <a:headEnd type="none" w="med" len="med"/>
+                      <a:tailEnd type="none" w="med" len="med"/>
+                    </a:lnB>
+                    <a:solidFill>
+                      <a:srgbClr val="24262E"/>
+                    </a:solidFill>
+                  </a:tcPr>
+                </a:tc>
+                <a:tc>
+                  <a:txBody>
+                    <a:bodyPr/>
+                    <a:lstStyle/>
+                    <a:p>
+                      <a:pPr indent="0" marL="0">
+                        <a:buNone/>
+                      </a:pPr>
+                      <a:r>
+                        <a:rPr lang="en-US" sz="1050" dirty="0">
+                          <a:solidFill>
+                            <a:srgbClr val="C9CED6"/>
+                          </a:solidFill>
+                          <a:latin typeface="Calibri" pitchFamily="34" charset="0"/>
+                          <a:ea typeface="Calibri" pitchFamily="34" charset="-122"/>
+                          <a:cs typeface="Calibri" pitchFamily="34" charset="-120"/>
+                        </a:rPr>
+                        <a:t>Audio, video &amp; chat end-to-end encrypted</a:t>
+                      </a:r>
+                      <a:endParaRPr lang="en-US" sz="1050" dirty="0">
+                        <a:latin typeface="Calibri" charset="0"/>
+                        <a:ea typeface="Calibri" charset="0"/>
+                        <a:cs typeface="Calibri" charset="0"/>
+                      </a:endParaRPr>
+                    </a:p>
+                  </a:txBody>
+                  <a:tcPr marL="64008" marR="64008" marT="64008" marB="64008" anchor="ctr">
+                    <a:lnL w="6350" cap="flat" cmpd="sng" algn="ctr">
+                      <a:solidFill>
+                        <a:srgbClr val="3A3D46"/>
+                      </a:solidFill>
+                      <a:prstDash val="solid"/>
+                      <a:round/>
+                      <a:headEnd type="none" w="med" len="med"/>
+                      <a:tailEnd type="none" w="med" len="med"/>
+                    </a:lnL>
+                    <a:lnR w="6350" cap="flat" cmpd="sng" algn="ctr">
+                      <a:solidFill>
+                        <a:srgbClr val="3A3D46"/>
+                      </a:solidFill>
+                      <a:prstDash val="solid"/>
+                      <a:round/>
+                      <a:headEnd type="none" w="med" len="med"/>
+                      <a:tailEnd type="none" w="med" len="med"/>
+                    </a:lnR>
+                    <a:lnT w="6350" cap="flat" cmpd="sng" algn="ctr">
+                      <a:solidFill>
+                        <a:srgbClr val="3A3D46"/>
+                      </a:solidFill>
+                      <a:prstDash val="solid"/>
+                      <a:round/>
+                      <a:headEnd type="none" w="med" len="med"/>
+                      <a:tailEnd type="none" w="med" len="med"/>
+                    </a:lnT>
+                    <a:lnB w="6350" cap="flat" cmpd="sng" algn="ctr">
+                      <a:solidFill>
+                        <a:srgbClr val="3A3D46"/>
+                      </a:solidFill>
+                      <a:prstDash val="solid"/>
+                      <a:round/>
+                      <a:headEnd type="none" w="med" len="med"/>
+                      <a:tailEnd type="none" w="med" len="med"/>
+                    </a:lnB>
+                    <a:solidFill>
+                      <a:srgbClr val="24262E"/>
+                    </a:solidFill>
+                  </a:tcPr>
+                </a:tc>
+              </a:tr>
             </a:tbl>
           </a:graphicData>
         </a:graphic>
@@ -13337,6 +14650,27 @@
                 <a:ea typeface="Calibri" pitchFamily="34" charset="-122"/>
                 <a:cs typeface="Calibri" pitchFamily="34" charset="-120"/>
               </a:rPr>
+              <a:t>Invite by email — invitees get the details and a join link</a:t>
+            </a:r>
+            <a:endParaRPr lang="en-US" sz="1100" dirty="0"/>
+          </a:p>
+          <a:p>
+            <a:pPr marL="342900" indent="-342900">
+              <a:spcAft>
+                <a:spcPts val="600"/>
+              </a:spcAft>
+              <a:buSzPct val="100000"/>
+              <a:buChar char="•"/>
+            </a:pPr>
+            <a:r>
+              <a:rPr lang="en-US" sz="1100" dirty="0">
+                <a:solidFill>
+                  <a:srgbClr val="C9CED6"/>
+                </a:solidFill>
+                <a:latin typeface="Calibri" pitchFamily="34" charset="0"/>
+                <a:ea typeface="Calibri" pitchFamily="34" charset="-122"/>
+                <a:cs typeface="Calibri" pitchFamily="34" charset="-120"/>
+              </a:rPr>
               <a:t>Appears under “Your meetings” — click Start when it's time</a:t>
             </a:r>
             <a:endParaRPr lang="en-US" sz="1100" dirty="0"/>
@@ -14410,6 +15744,27 @@
                 <a:cs typeface="Calibri" pitchFamily="34" charset="-120"/>
               </a:rPr>
               <a:t>Public history (last 100 messages) replays when you join late.</a:t>
+            </a:r>
+            <a:endParaRPr lang="en-US" sz="1150" dirty="0"/>
+          </a:p>
+          <a:p>
+            <a:pPr marL="342900" indent="-342900">
+              <a:spcAft>
+                <a:spcPts val="600"/>
+              </a:spcAft>
+              <a:buSzPct val="100000"/>
+              <a:buChar char="•"/>
+            </a:pPr>
+            <a:r>
+              <a:rPr lang="en-US" sz="1150" dirty="0">
+                <a:solidFill>
+                  <a:srgbClr val="C9CED6"/>
+                </a:solidFill>
+                <a:latin typeface="Calibri" pitchFamily="34" charset="0"/>
+                <a:ea typeface="Calibri" pitchFamily="34" charset="-122"/>
+                <a:cs typeface="Calibri" pitchFamily="34" charset="-120"/>
+              </a:rPr>
+              <a:t>🔒 End-to-end encrypted — the server only ever sees ciphertext.</a:t>
             </a:r>
             <a:endParaRPr lang="en-US" sz="1150" dirty="0"/>
           </a:p>

--- a/docs/Z+ User & Admin Guide.pptx
+++ b/docs/Z+ User & Admin Guide.pptx
@@ -9079,7 +9079,7 @@
                 <a:ea typeface="Calibri" pitchFamily="34" charset="-122"/>
                 <a:cs typeface="Calibri" pitchFamily="34" charset="-120"/>
               </a:rPr>
-              <a:t>Everything the admin GUI does, scriptable</a:t>
+              <a:t>Desktop admin console (Avalonia)</a:t>
             </a:r>
             <a:endParaRPr lang="en-US" sz="1050" dirty="0"/>
           </a:p>
@@ -9100,7 +9100,7 @@
                 <a:ea typeface="Calibri" pitchFamily="34" charset="-122"/>
                 <a:cs typeface="Calibri" pitchFamily="34" charset="-120"/>
               </a:rPr>
-              <a:t>users list / create / update / reset-password</a:t>
+              <a:t>Users &amp; roles, every server setting incl. SMTP</a:t>
             </a:r>
             <a:endParaRPr lang="en-US" sz="1050" dirty="0"/>
           </a:p>
@@ -9121,7 +9121,7 @@
                 <a:ea typeface="Calibri" pitchFamily="34" charset="-122"/>
                 <a:cs typeface="Calibri" pitchFamily="34" charset="-120"/>
               </a:rPr>
-              <a:t>settings get / set · meetings list / end</a:t>
+              <a:t>Monitor &amp; force-end meetings</a:t>
             </a:r>
             <a:endParaRPr lang="en-US" sz="1050" dirty="0"/>
           </a:p>
@@ -9142,7 +9142,7 @@
                 <a:ea typeface="Calibri" pitchFamily="34" charset="-122"/>
                 <a:cs typeface="Calibri" pitchFamily="34" charset="-120"/>
               </a:rPr>
-              <a:t>Credentials via flags, env vars or prompts</a:t>
+              <a:t>Same interface as the Windows admin app</a:t>
             </a:r>
             <a:endParaRPr lang="en-US" sz="1050" dirty="0"/>
           </a:p>
@@ -9297,7 +9297,7 @@
                 <a:ea typeface="Calibri" pitchFamily="34" charset="-122"/>
                 <a:cs typeface="Calibri" pitchFamily="34" charset="-120"/>
               </a:rPr>
-              <a:t>Console meeting client for Linux users</a:t>
+              <a:t>Desktop meeting client (Avalonia)</a:t>
             </a:r>
             <a:endParaRPr lang="en-US" sz="1050" dirty="0"/>
           </a:p>
@@ -9318,7 +9318,7 @@
                 <a:ea typeface="Calibri" pitchFamily="34" charset="-122"/>
                 <a:cs typeface="Calibri" pitchFamily="34" charset="-120"/>
               </a:rPr>
-              <a:t>Start / join meetings, roster, chat</a:t>
+              <a:t>Same sign-in &amp; Home screen as Windows</a:t>
             </a:r>
             <a:endParaRPr lang="en-US" sz="1050" dirty="0"/>
           </a:p>
@@ -9339,7 +9339,7 @@
                 <a:ea typeface="Calibri" pitchFamily="34" charset="-122"/>
                 <a:cs typeface="Calibri" pitchFamily="34" charset="-120"/>
               </a:rPr>
-              <a:t>/who · /msg · /end · /leave</a:t>
+              <a:t>Roster, host controls, E2E-encrypted chat</a:t>
             </a:r>
             <a:endParaRPr lang="en-US" sz="1050" dirty="0"/>
           </a:p>
@@ -9360,7 +9360,7 @@
                 <a:ea typeface="Calibri" pitchFamily="34" charset="-122"/>
                 <a:cs typeface="Calibri" pitchFamily="34" charset="-120"/>
               </a:rPr>
-              <a:t>No audio/video — chat participation</a:t>
+              <a:t>No audio/video yet — chat participation</a:t>
             </a:r>
             <a:endParaRPr lang="en-US" sz="1050" dirty="0"/>
           </a:p>
@@ -9443,7 +9443,7 @@
                 <a:ea typeface="Calibri" pitchFamily="34" charset="-122"/>
                 <a:cs typeface="Calibri" pitchFamily="34" charset="-120"/>
               </a:rPr>
-              <a:t>The console tools also run on Windows — handy for scripting admin tasks on either platform.</a:t>
+              <a:t>The Linux apps share their code with the Windows apps — one interface, both platforms, one meeting.</a:t>
             </a:r>
             <a:endParaRPr lang="en-US" sz="1100" dirty="0"/>
           </a:p>
